--- a/.agents/skills/processing-reimbursement/assets/信息概要的模版.pptx
+++ b/.agents/skills/processing-reimbursement/assets/信息概要的模版.pptx
@@ -343,7 +343,7 @@
           <a:p>
             <a:fld id="{B7268E1E-0E44-426D-905E-8AD9B19D2182}" type="datetimeFigureOut">
               <a:rPr lang="cs-CZ" smtClean="0"/>
-              <a:t>20.09.2026</a:t>
+              <a:t>23.09.2026</a:t>
             </a:fld>
             <a:endParaRPr lang="cs-CZ"/>
           </a:p>
@@ -12376,7 +12376,7 @@
               <a:t>：</a:t>
             </a:r>
             <a:r>
-              <a:rPr lang="zh-CN" altLang="en-US" sz="3200" b="1" i="0" u="sng" strike="noStrike" dirty="0">
+              <a:rPr lang="en-US" altLang="zh-CN" sz="3200" b="1" i="0" u="sng" strike="noStrike" dirty="0">
                 <a:solidFill>
                   <a:srgbClr val="C00000"/>
                 </a:solidFill>
@@ -12385,17 +12385,8 @@
                 <a:cs typeface="微软雅黑"/>
                 <a:sym typeface="微软雅黑"/>
               </a:rPr>
-              <a:t>儿童手工</a:t>
+              <a:t>XXX </a:t>
             </a:r>
-            <a:endParaRPr lang="en-US" altLang="zh-CN" sz="3200" b="1" i="0" u="sng" strike="noStrike" dirty="0">
-              <a:solidFill>
-                <a:srgbClr val="C00000"/>
-              </a:solidFill>
-              <a:latin typeface="微软雅黑"/>
-              <a:ea typeface="微软雅黑"/>
-              <a:cs typeface="微软雅黑"/>
-              <a:sym typeface="微软雅黑"/>
-            </a:endParaRPr>
           </a:p>
           <a:p>
             <a:pPr>
@@ -12482,7 +12473,7 @@
               <a:t>：</a:t>
             </a:r>
             <a:r>
-              <a:rPr lang="zh-CN" altLang="en-US" sz="3200" b="1" i="0" u="sng" strike="noStrike" dirty="0">
+              <a:rPr lang="en-US" altLang="zh-CN" sz="3200" b="1" i="0" u="sng" strike="noStrike" dirty="0">
                 <a:solidFill>
                   <a:srgbClr val="C00000"/>
                 </a:solidFill>
@@ -12491,7 +12482,7 @@
                 <a:cs typeface="微软雅黑"/>
                 <a:sym typeface="微软雅黑"/>
               </a:rPr>
-              <a:t>王熠然</a:t>
+              <a:t>XXX</a:t>
             </a:r>
             <a:endParaRPr lang="en-US" altLang="zh-CN" sz="3200" b="1" i="0" strike="noStrike" dirty="0">
               <a:solidFill>
@@ -12544,7 +12535,7 @@
                 <a:cs typeface="微软雅黑"/>
                 <a:sym typeface="微软雅黑"/>
               </a:rPr>
-              <a:t>18681638192</a:t>
+              <a:t>XXX</a:t>
             </a:r>
           </a:p>
         </p:txBody>
